--- a/第2章-变量与数据类型/第2章-变量与数据类型.pptx
+++ b/第2章-变量与数据类型/第2章-变量与数据类型.pptx
@@ -6,10 +6,10 @@
     <p:sldMasterId id="2147484986" r:id="rId2"/>
   </p:sldMasterIdLst>
   <p:notesMasterIdLst>
-    <p:notesMasterId r:id="rId31"/>
+    <p:notesMasterId r:id="rId32"/>
   </p:notesMasterIdLst>
   <p:handoutMasterIdLst>
-    <p:handoutMasterId r:id="rId32"/>
+    <p:handoutMasterId r:id="rId33"/>
   </p:handoutMasterIdLst>
   <p:sldIdLst>
     <p:sldId id="2708" r:id="rId3"/>
@@ -38,13 +38,14 @@
     <p:sldId id="2789" r:id="rId26"/>
     <p:sldId id="2772" r:id="rId27"/>
     <p:sldId id="2782" r:id="rId28"/>
-    <p:sldId id="2741" r:id="rId29"/>
-    <p:sldId id="2760" r:id="rId30"/>
+    <p:sldId id="2760" r:id="rId29"/>
+    <p:sldId id="2791" r:id="rId30"/>
+    <p:sldId id="2792" r:id="rId31"/>
   </p:sldIdLst>
   <p:sldSz cx="12192000" cy="6858000"/>
   <p:notesSz cx="7099300" cy="10234613"/>
   <p:custDataLst>
-    <p:tags r:id="rId33"/>
+    <p:tags r:id="rId34"/>
   </p:custDataLst>
   <p:defaultTextStyle>
     <a:defPPr>
@@ -1412,7 +1413,7 @@
               </a14:hiddenFill>
             </a:ext>
             <a:ext uri="{FAA26D3D-D897-4be2-8F04-BA451C77F1D7}">
-              <ma14:placeholderFlag xmlns="" xmlns:ma14="http://schemas.microsoft.com/office/mac/drawingml/2011/main" val="1"/>
+              <ma14:placeholderFlag xmlns:ma14="http://schemas.microsoft.com/office/mac/drawingml/2011/main" xmlns="" val="1"/>
             </a:ext>
           </a:extLst>
         </p:spPr>
@@ -1800,7 +1801,7 @@
               </a14:hiddenLine>
             </a:ext>
             <a:ext uri="{FAA26D3D-D897-4be2-8F04-BA451C77F1D7}">
-              <ma14:placeholderFlag xmlns:ma14="http://schemas.microsoft.com/office/mac/drawingml/2011/main" xmlns="" val="1"/>
+              <ma14:placeholderFlag xmlns="" xmlns:ma14="http://schemas.microsoft.com/office/mac/drawingml/2011/main" val="1"/>
             </a:ext>
           </a:extLst>
         </p:spPr>
@@ -3426,67 +3427,6 @@
             <p:ph type="sldImg"/>
           </p:nvPr>
         </p:nvSpPr>
-        <p:spPr/>
-      </p:sp>
-      <p:sp>
-        <p:nvSpPr>
-          <p:cNvPr id="3" name="备注占位符 2"/>
-          <p:cNvSpPr>
-            <a:spLocks noGrp="1"/>
-          </p:cNvSpPr>
-          <p:nvPr>
-            <p:ph type="body" idx="1"/>
-          </p:nvPr>
-        </p:nvSpPr>
-        <p:spPr/>
-        <p:txBody>
-          <a:bodyPr/>
-          <a:lstStyle/>
-          <a:p>
-            <a:endParaRPr lang="zh-CN" altLang="en-US" dirty="0"/>
-          </a:p>
-        </p:txBody>
-      </p:sp>
-    </p:spTree>
-    <p:extLst>
-      <p:ext uri="{BB962C8B-B14F-4D97-AF65-F5344CB8AC3E}">
-        <p14:creationId xmlns:p14="http://schemas.microsoft.com/office/powerpoint/2010/main" val="3363326210"/>
-      </p:ext>
-    </p:extLst>
-  </p:cSld>
-  <p:clrMapOvr>
-    <a:masterClrMapping/>
-  </p:clrMapOvr>
-</p:notes>
-</file>
-
-<file path=ppt/notesSlides/notesSlide28.xml><?xml version="1.0" encoding="utf-8"?>
-<p:notes xmlns:a="http://schemas.openxmlformats.org/drawingml/2006/main" xmlns:r="http://schemas.openxmlformats.org/officeDocument/2006/relationships" xmlns:p="http://schemas.openxmlformats.org/presentationml/2006/main">
-  <p:cSld>
-    <p:spTree>
-      <p:nvGrpSpPr>
-        <p:cNvPr id="1" name=""/>
-        <p:cNvGrpSpPr/>
-        <p:nvPr/>
-      </p:nvGrpSpPr>
-      <p:grpSpPr>
-        <a:xfrm>
-          <a:off x="0" y="0"/>
-          <a:ext cx="0" cy="0"/>
-          <a:chOff x="0" y="0"/>
-          <a:chExt cx="0" cy="0"/>
-        </a:xfrm>
-      </p:grpSpPr>
-      <p:sp>
-        <p:nvSpPr>
-          <p:cNvPr id="2" name="幻灯片图像占位符 1"/>
-          <p:cNvSpPr>
-            <a:spLocks noGrp="1" noRot="1" noChangeAspect="1"/>
-          </p:cNvSpPr>
-          <p:nvPr>
-            <p:ph type="sldImg"/>
-          </p:nvPr>
-        </p:nvSpPr>
         <p:spPr>
           <a:xfrm>
             <a:off x="142875" y="768350"/>
@@ -3517,6 +3457,174 @@
     <p:extLst>
       <p:ext uri="{BB962C8B-B14F-4D97-AF65-F5344CB8AC3E}">
         <p14:creationId xmlns:p14="http://schemas.microsoft.com/office/powerpoint/2010/main" val="3241313290"/>
+      </p:ext>
+    </p:extLst>
+  </p:cSld>
+  <p:clrMapOvr>
+    <a:masterClrMapping/>
+  </p:clrMapOvr>
+</p:notes>
+</file>
+
+<file path=ppt/notesSlides/notesSlide28.xml><?xml version="1.0" encoding="utf-8"?>
+<p:notes xmlns:a="http://schemas.openxmlformats.org/drawingml/2006/main" xmlns:r="http://schemas.openxmlformats.org/officeDocument/2006/relationships" xmlns:p="http://schemas.openxmlformats.org/presentationml/2006/main">
+  <p:cSld>
+    <p:spTree>
+      <p:nvGrpSpPr>
+        <p:cNvPr id="1" name="">
+          <a:extLst>
+            <a:ext uri="{FF2B5EF4-FFF2-40B4-BE49-F238E27FC236}">
+              <a16:creationId xmlns:a16="http://schemas.microsoft.com/office/drawing/2014/main" id="{1E7054F7-83F0-6185-6022-24848DCA9B9F}"/>
+            </a:ext>
+          </a:extLst>
+        </p:cNvPr>
+        <p:cNvGrpSpPr/>
+        <p:nvPr/>
+      </p:nvGrpSpPr>
+      <p:grpSpPr>
+        <a:xfrm>
+          <a:off x="0" y="0"/>
+          <a:ext cx="0" cy="0"/>
+          <a:chOff x="0" y="0"/>
+          <a:chExt cx="0" cy="0"/>
+        </a:xfrm>
+      </p:grpSpPr>
+      <p:sp>
+        <p:nvSpPr>
+          <p:cNvPr id="2" name="幻灯片图像占位符 1">
+            <a:extLst>
+              <a:ext uri="{FF2B5EF4-FFF2-40B4-BE49-F238E27FC236}">
+                <a16:creationId xmlns:a16="http://schemas.microsoft.com/office/drawing/2014/main" id="{24F57BEF-63C2-E61F-57B6-0396B41725F0}"/>
+              </a:ext>
+            </a:extLst>
+          </p:cNvPr>
+          <p:cNvSpPr>
+            <a:spLocks noGrp="1" noRot="1" noChangeAspect="1"/>
+          </p:cNvSpPr>
+          <p:nvPr>
+            <p:ph type="sldImg"/>
+          </p:nvPr>
+        </p:nvSpPr>
+        <p:spPr>
+          <a:xfrm>
+            <a:off x="142875" y="768350"/>
+            <a:ext cx="6818313" cy="3836988"/>
+          </a:xfrm>
+        </p:spPr>
+      </p:sp>
+      <p:sp>
+        <p:nvSpPr>
+          <p:cNvPr id="3" name="备注占位符 2">
+            <a:extLst>
+              <a:ext uri="{FF2B5EF4-FFF2-40B4-BE49-F238E27FC236}">
+                <a16:creationId xmlns:a16="http://schemas.microsoft.com/office/drawing/2014/main" id="{505D03C1-A8CC-EBC3-547A-58D3FDEE752B}"/>
+              </a:ext>
+            </a:extLst>
+          </p:cNvPr>
+          <p:cNvSpPr>
+            <a:spLocks noGrp="1"/>
+          </p:cNvSpPr>
+          <p:nvPr>
+            <p:ph type="body" idx="1"/>
+          </p:nvPr>
+        </p:nvSpPr>
+        <p:spPr/>
+        <p:txBody>
+          <a:bodyPr/>
+          <a:lstStyle/>
+          <a:p>
+            <a:endParaRPr lang="zh-CN" altLang="en-US" dirty="0"/>
+          </a:p>
+        </p:txBody>
+      </p:sp>
+    </p:spTree>
+    <p:extLst>
+      <p:ext uri="{BB962C8B-B14F-4D97-AF65-F5344CB8AC3E}">
+        <p14:creationId xmlns:p14="http://schemas.microsoft.com/office/powerpoint/2010/main" val="2143777571"/>
+      </p:ext>
+    </p:extLst>
+  </p:cSld>
+  <p:clrMapOvr>
+    <a:masterClrMapping/>
+  </p:clrMapOvr>
+</p:notes>
+</file>
+
+<file path=ppt/notesSlides/notesSlide29.xml><?xml version="1.0" encoding="utf-8"?>
+<p:notes xmlns:a="http://schemas.openxmlformats.org/drawingml/2006/main" xmlns:r="http://schemas.openxmlformats.org/officeDocument/2006/relationships" xmlns:p="http://schemas.openxmlformats.org/presentationml/2006/main">
+  <p:cSld>
+    <p:spTree>
+      <p:nvGrpSpPr>
+        <p:cNvPr id="1" name="">
+          <a:extLst>
+            <a:ext uri="{FF2B5EF4-FFF2-40B4-BE49-F238E27FC236}">
+              <a16:creationId xmlns:a16="http://schemas.microsoft.com/office/drawing/2014/main" id="{762BF62F-9C69-14E7-548A-9A3F284D2B82}"/>
+            </a:ext>
+          </a:extLst>
+        </p:cNvPr>
+        <p:cNvGrpSpPr/>
+        <p:nvPr/>
+      </p:nvGrpSpPr>
+      <p:grpSpPr>
+        <a:xfrm>
+          <a:off x="0" y="0"/>
+          <a:ext cx="0" cy="0"/>
+          <a:chOff x="0" y="0"/>
+          <a:chExt cx="0" cy="0"/>
+        </a:xfrm>
+      </p:grpSpPr>
+      <p:sp>
+        <p:nvSpPr>
+          <p:cNvPr id="2" name="幻灯片图像占位符 1">
+            <a:extLst>
+              <a:ext uri="{FF2B5EF4-FFF2-40B4-BE49-F238E27FC236}">
+                <a16:creationId xmlns:a16="http://schemas.microsoft.com/office/drawing/2014/main" id="{C610B1B5-0817-A040-761B-5ADE591F6316}"/>
+              </a:ext>
+            </a:extLst>
+          </p:cNvPr>
+          <p:cNvSpPr>
+            <a:spLocks noGrp="1" noRot="1" noChangeAspect="1"/>
+          </p:cNvSpPr>
+          <p:nvPr>
+            <p:ph type="sldImg"/>
+          </p:nvPr>
+        </p:nvSpPr>
+        <p:spPr>
+          <a:xfrm>
+            <a:off x="142875" y="768350"/>
+            <a:ext cx="6818313" cy="3836988"/>
+          </a:xfrm>
+        </p:spPr>
+      </p:sp>
+      <p:sp>
+        <p:nvSpPr>
+          <p:cNvPr id="3" name="备注占位符 2">
+            <a:extLst>
+              <a:ext uri="{FF2B5EF4-FFF2-40B4-BE49-F238E27FC236}">
+                <a16:creationId xmlns:a16="http://schemas.microsoft.com/office/drawing/2014/main" id="{D8CE0989-6983-67F6-6D75-6889D00C5D82}"/>
+              </a:ext>
+            </a:extLst>
+          </p:cNvPr>
+          <p:cNvSpPr>
+            <a:spLocks noGrp="1"/>
+          </p:cNvSpPr>
+          <p:nvPr>
+            <p:ph type="body" idx="1"/>
+          </p:nvPr>
+        </p:nvSpPr>
+        <p:spPr/>
+        <p:txBody>
+          <a:bodyPr/>
+          <a:lstStyle/>
+          <a:p>
+            <a:endParaRPr lang="zh-CN" altLang="en-US" dirty="0"/>
+          </a:p>
+        </p:txBody>
+      </p:sp>
+    </p:spTree>
+    <p:extLst>
+      <p:ext uri="{BB962C8B-B14F-4D97-AF65-F5344CB8AC3E}">
+        <p14:creationId xmlns:p14="http://schemas.microsoft.com/office/powerpoint/2010/main" val="3476035826"/>
       </p:ext>
     </p:extLst>
   </p:cSld>
@@ -6051,7 +6159,7 @@
               </a14:hiddenLine>
             </a:ext>
             <a:ext uri="{FAA26D3D-D897-4be2-8F04-BA451C77F1D7}">
-              <ma14:placeholderFlag xmlns:ma14="http://schemas.microsoft.com/office/mac/drawingml/2011/main" xmlns="" val="1"/>
+              <ma14:placeholderFlag xmlns="" xmlns:ma14="http://schemas.microsoft.com/office/mac/drawingml/2011/main" val="1"/>
             </a:ext>
           </a:extLst>
         </p:spPr>
@@ -9747,7 +9855,7 @@
               </a14:hiddenLine>
             </a:ext>
             <a:ext uri="{FAA26D3D-D897-4be2-8F04-BA451C77F1D7}">
-              <ma14:placeholderFlag xmlns:ma14="http://schemas.microsoft.com/office/mac/drawingml/2011/main" xmlns="" val="1"/>
+              <ma14:placeholderFlag xmlns="" xmlns:ma14="http://schemas.microsoft.com/office/mac/drawingml/2011/main" val="1"/>
             </a:ext>
           </a:extLst>
         </p:spPr>
@@ -17865,7 +17973,7 @@
                 <a:ea typeface="+mn-ea"/>
                 <a:cs typeface="Times New Roman" panose="02020603050405020304" pitchFamily="18" charset="0"/>
               </a:rPr>
-              <a:t>i</a:t>
+              <a:t>student</a:t>
             </a:r>
             <a:r>
               <a:rPr lang="en-US" altLang="zh-CN" sz="2800" b="1" dirty="0" err="1">
@@ -17877,7 +17985,7 @@
                 <a:ea typeface="+mn-ea"/>
                 <a:cs typeface="Times New Roman" panose="02020603050405020304" pitchFamily="18" charset="0"/>
               </a:rPr>
-              <a:t>tem_count</a:t>
+              <a:t>_count</a:t>
             </a:r>
             <a:r>
               <a:rPr lang="en-US" altLang="zh-CN" sz="2800" b="1" dirty="0">
@@ -19088,7 +19196,7 @@
                 <a:latin typeface="Times New Roman" panose="02020603050405020304" pitchFamily="18" charset="0"/>
                 <a:cs typeface="Times New Roman" panose="02020603050405020304" pitchFamily="18" charset="0"/>
               </a:rPr>
-              <a:t>10 </a:t>
+              <a:t>a </a:t>
             </a:r>
             <a:r>
               <a:rPr lang="en-US" altLang="zh-CN" sz="2800" b="1" dirty="0">
@@ -19221,7 +19329,7 @@
                 <a:latin typeface="Times New Roman" panose="02020603050405020304" pitchFamily="18" charset="0"/>
                 <a:cs typeface="Times New Roman" panose="02020603050405020304" pitchFamily="18" charset="0"/>
               </a:rPr>
-              <a:t>print(n)               </a:t>
+              <a:t>print(b)               </a:t>
             </a:r>
             <a:r>
               <a:rPr lang="en-US" altLang="zh-CN" sz="2800" b="1" dirty="0">
@@ -19436,7 +19544,7 @@
         </p:nvGraphicFramePr>
         <p:xfrm>
           <a:off x="943427" y="2349865"/>
-          <a:ext cx="10617200" cy="2475702"/>
+          <a:ext cx="10617200" cy="2475766"/>
         </p:xfrm>
         <a:graphic>
           <a:graphicData uri="http://schemas.openxmlformats.org/drawingml/2006/table">
@@ -30326,274 +30434,6 @@
         </p:nvSpPr>
         <p:spPr>
           <a:xfrm>
-            <a:off x="1" y="8526"/>
-            <a:ext cx="10537372" cy="792162"/>
-          </a:xfrm>
-        </p:spPr>
-        <p:txBody>
-          <a:bodyPr/>
-          <a:lstStyle/>
-          <a:p>
-            <a:r>
-              <a:rPr lang="zh-CN" altLang="en-US" dirty="0">
-                <a:latin typeface="+mn-ea"/>
-              </a:rPr>
-              <a:t>二、</a:t>
-            </a:r>
-            <a:r>
-              <a:rPr lang="zh-CN" altLang="en-US" dirty="0">
-                <a:latin typeface="微软雅黑" pitchFamily="34" charset="-122"/>
-                <a:ea typeface="微软雅黑" pitchFamily="34" charset="-122"/>
-              </a:rPr>
-              <a:t>变量命名、赋值与运算</a:t>
-            </a:r>
-            <a:endParaRPr lang="zh-CN" altLang="en-US" dirty="0"/>
-          </a:p>
-        </p:txBody>
-      </p:sp>
-      <p:sp>
-        <p:nvSpPr>
-          <p:cNvPr id="2" name="TextBox 1">
-            <a:extLst>
-              <a:ext uri="{FF2B5EF4-FFF2-40B4-BE49-F238E27FC236}">
-                <a16:creationId xmlns:a16="http://schemas.microsoft.com/office/drawing/2014/main" id="{631AADB6-C88A-D817-4683-FC087E4E240F}"/>
-              </a:ext>
-            </a:extLst>
-          </p:cNvPr>
-          <p:cNvSpPr txBox="1"/>
-          <p:nvPr/>
-        </p:nvSpPr>
-        <p:spPr>
-          <a:xfrm>
-            <a:off x="730294" y="1022545"/>
-            <a:ext cx="10744529" cy="825419"/>
-          </a:xfrm>
-          <a:prstGeom prst="rect">
-            <a:avLst/>
-          </a:prstGeom>
-          <a:noFill/>
-        </p:spPr>
-        <p:txBody>
-          <a:bodyPr wrap="square" rtlCol="0">
-            <a:spAutoFit/>
-          </a:bodyPr>
-          <a:lstStyle/>
-          <a:p>
-            <a:pPr algn="just">
-              <a:lnSpc>
-                <a:spcPct val="150000"/>
-              </a:lnSpc>
-            </a:pPr>
-            <a:r>
-              <a:rPr lang="zh-CN" altLang="en-US" sz="3600" b="1" dirty="0">
-                <a:solidFill>
-                  <a:srgbClr val="333333"/>
-                </a:solidFill>
-                <a:latin typeface="+mn-ea"/>
-                <a:ea typeface="+mn-ea"/>
-              </a:rPr>
-              <a:t>实验练习及要求</a:t>
-            </a:r>
-            <a:endParaRPr lang="en-US" altLang="zh-CN" sz="3600" b="1" dirty="0">
-              <a:solidFill>
-                <a:srgbClr val="333333"/>
-              </a:solidFill>
-              <a:latin typeface="+mn-ea"/>
-              <a:ea typeface="+mn-ea"/>
-            </a:endParaRPr>
-          </a:p>
-        </p:txBody>
-      </p:sp>
-      <p:sp>
-        <p:nvSpPr>
-          <p:cNvPr id="5" name="TextBox 4">
-            <a:extLst>
-              <a:ext uri="{FF2B5EF4-FFF2-40B4-BE49-F238E27FC236}">
-                <a16:creationId xmlns:a16="http://schemas.microsoft.com/office/drawing/2014/main" id="{FCD10A89-5E0E-5D73-1D4F-9E11D943B29C}"/>
-              </a:ext>
-            </a:extLst>
-          </p:cNvPr>
-          <p:cNvSpPr txBox="1"/>
-          <p:nvPr/>
-        </p:nvSpPr>
-        <p:spPr>
-          <a:xfrm>
-            <a:off x="730294" y="1866676"/>
-            <a:ext cx="10744529" cy="3224794"/>
-          </a:xfrm>
-          <a:prstGeom prst="rect">
-            <a:avLst/>
-          </a:prstGeom>
-          <a:noFill/>
-        </p:spPr>
-        <p:txBody>
-          <a:bodyPr wrap="square">
-            <a:spAutoFit/>
-          </a:bodyPr>
-          <a:lstStyle/>
-          <a:p>
-            <a:pPr algn="just">
-              <a:lnSpc>
-                <a:spcPct val="200000"/>
-              </a:lnSpc>
-            </a:pPr>
-            <a:r>
-              <a:rPr lang="zh-CN" altLang="en-US" sz="3600" b="1" dirty="0">
-                <a:solidFill>
-                  <a:srgbClr val="FF0000"/>
-                </a:solidFill>
-                <a:latin typeface="+mn-ea"/>
-                <a:ea typeface="+mn-ea"/>
-              </a:rPr>
-              <a:t>变量与数据类型代码学习</a:t>
-            </a:r>
-            <a:endParaRPr lang="en-US" altLang="zh-CN" sz="3600" b="1" dirty="0">
-              <a:solidFill>
-                <a:srgbClr val="FF0000"/>
-              </a:solidFill>
-              <a:latin typeface="+mn-ea"/>
-              <a:ea typeface="+mn-ea"/>
-            </a:endParaRPr>
-          </a:p>
-          <a:p>
-            <a:pPr marL="342900" indent="-342900" algn="just">
-              <a:lnSpc>
-                <a:spcPct val="200000"/>
-              </a:lnSpc>
-              <a:buFont typeface="Arial" panose="020B0604020202020204" pitchFamily="34" charset="0"/>
-              <a:buChar char="•"/>
-            </a:pPr>
-            <a:r>
-              <a:rPr lang="zh-CN" altLang="en-US" sz="2800" dirty="0">
-                <a:solidFill>
-                  <a:srgbClr val="333333"/>
-                </a:solidFill>
-                <a:latin typeface="+mn-ea"/>
-                <a:ea typeface="+mn-ea"/>
-              </a:rPr>
-              <a:t>根据第二章节提供代码，</a:t>
-            </a:r>
-            <a:r>
-              <a:rPr lang="zh-CN" altLang="en-US" sz="2800" b="1" u="sng" dirty="0">
-                <a:solidFill>
-                  <a:srgbClr val="333333"/>
-                </a:solidFill>
-                <a:latin typeface="+mn-ea"/>
-                <a:ea typeface="+mn-ea"/>
-              </a:rPr>
-              <a:t>学习变量赋值与不同数据类型基本操作</a:t>
-            </a:r>
-            <a:r>
-              <a:rPr lang="zh-CN" altLang="en-US" sz="2800" dirty="0">
-                <a:solidFill>
-                  <a:srgbClr val="333333"/>
-                </a:solidFill>
-                <a:latin typeface="+mn-ea"/>
-                <a:ea typeface="+mn-ea"/>
-              </a:rPr>
-              <a:t>。</a:t>
-            </a:r>
-            <a:endParaRPr lang="en-US" altLang="zh-CN" sz="2800" dirty="0">
-              <a:solidFill>
-                <a:srgbClr val="333333"/>
-              </a:solidFill>
-              <a:latin typeface="+mn-ea"/>
-              <a:ea typeface="+mn-ea"/>
-            </a:endParaRPr>
-          </a:p>
-          <a:p>
-            <a:pPr marL="342900" indent="-342900" algn="just">
-              <a:lnSpc>
-                <a:spcPct val="200000"/>
-              </a:lnSpc>
-              <a:buFont typeface="Arial" panose="020B0604020202020204" pitchFamily="34" charset="0"/>
-              <a:buChar char="•"/>
-            </a:pPr>
-            <a:r>
-              <a:rPr lang="zh-CN" altLang="en-US" sz="2800" b="1" u="sng">
-                <a:solidFill>
-                  <a:srgbClr val="333333"/>
-                </a:solidFill>
-                <a:latin typeface="+mn-ea"/>
-                <a:ea typeface="+mn-ea"/>
-              </a:rPr>
-              <a:t>对比不同数据类型</a:t>
-            </a:r>
-            <a:r>
-              <a:rPr lang="zh-CN" altLang="en-US" sz="2800" b="1" u="sng" dirty="0">
-                <a:solidFill>
-                  <a:srgbClr val="333333"/>
-                </a:solidFill>
-                <a:latin typeface="+mn-ea"/>
-                <a:ea typeface="+mn-ea"/>
-              </a:rPr>
-              <a:t>差异</a:t>
-            </a:r>
-            <a:r>
-              <a:rPr lang="zh-CN" altLang="en-US" sz="2800" dirty="0">
-                <a:solidFill>
-                  <a:srgbClr val="333333"/>
-                </a:solidFill>
-                <a:latin typeface="+mn-ea"/>
-                <a:ea typeface="+mn-ea"/>
-              </a:rPr>
-              <a:t>。</a:t>
-            </a:r>
-            <a:endParaRPr lang="en-US" altLang="zh-CN" sz="2800" dirty="0">
-              <a:solidFill>
-                <a:srgbClr val="333333"/>
-              </a:solidFill>
-              <a:latin typeface="+mn-ea"/>
-              <a:ea typeface="+mn-ea"/>
-            </a:endParaRPr>
-          </a:p>
-        </p:txBody>
-      </p:sp>
-    </p:spTree>
-    <p:extLst>
-      <p:ext uri="{BB962C8B-B14F-4D97-AF65-F5344CB8AC3E}">
-        <p14:creationId xmlns:p14="http://schemas.microsoft.com/office/powerpoint/2010/main" val="4207004688"/>
-      </p:ext>
-    </p:extLst>
-  </p:cSld>
-  <p:clrMapOvr>
-    <a:masterClrMapping/>
-  </p:clrMapOvr>
-  <p:transition>
-    <p:fade/>
-  </p:transition>
-</p:sld>
-</file>
-
-<file path=ppt/slides/slide28.xml><?xml version="1.0" encoding="utf-8"?>
-<p:sld xmlns:a="http://schemas.openxmlformats.org/drawingml/2006/main" xmlns:r="http://schemas.openxmlformats.org/officeDocument/2006/relationships" xmlns:p="http://schemas.openxmlformats.org/presentationml/2006/main">
-  <p:cSld>
-    <p:spTree>
-      <p:nvGrpSpPr>
-        <p:cNvPr id="1" name=""/>
-        <p:cNvGrpSpPr/>
-        <p:nvPr/>
-      </p:nvGrpSpPr>
-      <p:grpSpPr>
-        <a:xfrm>
-          <a:off x="0" y="0"/>
-          <a:ext cx="0" cy="0"/>
-          <a:chOff x="0" y="0"/>
-          <a:chExt cx="0" cy="0"/>
-        </a:xfrm>
-      </p:grpSpPr>
-      <p:sp>
-        <p:nvSpPr>
-          <p:cNvPr id="3" name="标题 2"/>
-          <p:cNvSpPr>
-            <a:spLocks noGrp="1"/>
-          </p:cNvSpPr>
-          <p:nvPr>
-            <p:ph type="title"/>
-          </p:nvPr>
-        </p:nvSpPr>
-        <p:spPr>
-          <a:xfrm>
             <a:off x="72571" y="8526"/>
             <a:ext cx="10464801" cy="792162"/>
           </a:xfrm>
@@ -30846,6 +30686,716 @@
     <p:extLst>
       <p:ext uri="{BB962C8B-B14F-4D97-AF65-F5344CB8AC3E}">
         <p14:creationId xmlns:p14="http://schemas.microsoft.com/office/powerpoint/2010/main" val="1125183986"/>
+      </p:ext>
+    </p:extLst>
+  </p:cSld>
+  <p:clrMapOvr>
+    <a:masterClrMapping/>
+  </p:clrMapOvr>
+  <p:transition>
+    <p:fade/>
+  </p:transition>
+</p:sld>
+</file>
+
+<file path=ppt/slides/slide28.xml><?xml version="1.0" encoding="utf-8"?>
+<p:sld xmlns:a="http://schemas.openxmlformats.org/drawingml/2006/main" xmlns:r="http://schemas.openxmlformats.org/officeDocument/2006/relationships" xmlns:p="http://schemas.openxmlformats.org/presentationml/2006/main">
+  <p:cSld>
+    <p:spTree>
+      <p:nvGrpSpPr>
+        <p:cNvPr id="1" name="">
+          <a:extLst>
+            <a:ext uri="{FF2B5EF4-FFF2-40B4-BE49-F238E27FC236}">
+              <a16:creationId xmlns:a16="http://schemas.microsoft.com/office/drawing/2014/main" id="{461178ED-7785-12BF-CDC3-544370541931}"/>
+            </a:ext>
+          </a:extLst>
+        </p:cNvPr>
+        <p:cNvGrpSpPr/>
+        <p:nvPr/>
+      </p:nvGrpSpPr>
+      <p:grpSpPr>
+        <a:xfrm>
+          <a:off x="0" y="0"/>
+          <a:ext cx="0" cy="0"/>
+          <a:chOff x="0" y="0"/>
+          <a:chExt cx="0" cy="0"/>
+        </a:xfrm>
+      </p:grpSpPr>
+      <p:sp>
+        <p:nvSpPr>
+          <p:cNvPr id="3" name="标题 2">
+            <a:extLst>
+              <a:ext uri="{FF2B5EF4-FFF2-40B4-BE49-F238E27FC236}">
+                <a16:creationId xmlns:a16="http://schemas.microsoft.com/office/drawing/2014/main" id="{16AF96AC-B685-944D-37C1-EFFA0B929B81}"/>
+              </a:ext>
+            </a:extLst>
+          </p:cNvPr>
+          <p:cNvSpPr>
+            <a:spLocks noGrp="1"/>
+          </p:cNvSpPr>
+          <p:nvPr>
+            <p:ph type="title"/>
+          </p:nvPr>
+        </p:nvSpPr>
+        <p:spPr>
+          <a:xfrm>
+            <a:off x="1" y="8526"/>
+            <a:ext cx="10537374" cy="792162"/>
+          </a:xfrm>
+        </p:spPr>
+        <p:txBody>
+          <a:bodyPr/>
+          <a:lstStyle/>
+          <a:p>
+            <a:r>
+              <a:rPr lang="zh-CN" altLang="en-US" dirty="0">
+                <a:latin typeface="微软雅黑" pitchFamily="34" charset="-122"/>
+                <a:ea typeface="微软雅黑" pitchFamily="34" charset="-122"/>
+              </a:rPr>
+              <a:t>三、</a:t>
+            </a:r>
+            <a:r>
+              <a:rPr lang="en-US" altLang="zh-CN" dirty="0">
+                <a:latin typeface="微软雅黑" pitchFamily="34" charset="-122"/>
+                <a:ea typeface="微软雅黑" pitchFamily="34" charset="-122"/>
+              </a:rPr>
+              <a:t>Python</a:t>
+            </a:r>
+            <a:r>
+              <a:rPr lang="zh-CN" altLang="en-US" dirty="0">
+                <a:latin typeface="微软雅黑" pitchFamily="34" charset="-122"/>
+                <a:ea typeface="微软雅黑" pitchFamily="34" charset="-122"/>
+              </a:rPr>
+              <a:t>开发环境配置</a:t>
+            </a:r>
+            <a:endParaRPr lang="zh-CN" altLang="en-US" dirty="0"/>
+          </a:p>
+        </p:txBody>
+      </p:sp>
+      <p:sp>
+        <p:nvSpPr>
+          <p:cNvPr id="11" name="TextBox 10">
+            <a:extLst>
+              <a:ext uri="{FF2B5EF4-FFF2-40B4-BE49-F238E27FC236}">
+                <a16:creationId xmlns:a16="http://schemas.microsoft.com/office/drawing/2014/main" id="{42A2B05A-8AF7-3882-AF42-4AA29E8A165A}"/>
+              </a:ext>
+            </a:extLst>
+          </p:cNvPr>
+          <p:cNvSpPr txBox="1"/>
+          <p:nvPr/>
+        </p:nvSpPr>
+        <p:spPr>
+          <a:xfrm>
+            <a:off x="510073" y="797358"/>
+            <a:ext cx="9743375" cy="743986"/>
+          </a:xfrm>
+          <a:prstGeom prst="rect">
+            <a:avLst/>
+          </a:prstGeom>
+          <a:noFill/>
+        </p:spPr>
+        <p:txBody>
+          <a:bodyPr wrap="square" rtlCol="0">
+            <a:spAutoFit/>
+          </a:bodyPr>
+          <a:lstStyle/>
+          <a:p>
+            <a:pPr algn="just">
+              <a:lnSpc>
+                <a:spcPct val="150000"/>
+              </a:lnSpc>
+            </a:pPr>
+            <a:r>
+              <a:rPr lang="zh-CN" altLang="en-US" sz="3200" b="1" dirty="0">
+                <a:solidFill>
+                  <a:srgbClr val="333333"/>
+                </a:solidFill>
+                <a:latin typeface="+mn-ea"/>
+                <a:ea typeface="+mn-ea"/>
+              </a:rPr>
+              <a:t>实验一</a:t>
+            </a:r>
+            <a:endParaRPr lang="en-US" altLang="zh-CN" sz="3200" b="1" dirty="0">
+              <a:solidFill>
+                <a:srgbClr val="333333"/>
+              </a:solidFill>
+              <a:latin typeface="+mn-ea"/>
+              <a:ea typeface="+mn-ea"/>
+            </a:endParaRPr>
+          </a:p>
+        </p:txBody>
+      </p:sp>
+      <p:sp>
+        <p:nvSpPr>
+          <p:cNvPr id="13" name="TextBox 12">
+            <a:extLst>
+              <a:ext uri="{FF2B5EF4-FFF2-40B4-BE49-F238E27FC236}">
+                <a16:creationId xmlns:a16="http://schemas.microsoft.com/office/drawing/2014/main" id="{3EB8F2C9-36A5-3F40-3AF1-C1459948991C}"/>
+              </a:ext>
+            </a:extLst>
+          </p:cNvPr>
+          <p:cNvSpPr txBox="1"/>
+          <p:nvPr/>
+        </p:nvSpPr>
+        <p:spPr>
+          <a:xfrm>
+            <a:off x="583007" y="2028433"/>
+            <a:ext cx="11273508" cy="2957028"/>
+          </a:xfrm>
+          <a:prstGeom prst="rect">
+            <a:avLst/>
+          </a:prstGeom>
+          <a:noFill/>
+        </p:spPr>
+        <p:txBody>
+          <a:bodyPr wrap="square">
+            <a:spAutoFit/>
+          </a:bodyPr>
+          <a:lstStyle/>
+          <a:p>
+            <a:pPr algn="just">
+              <a:lnSpc>
+                <a:spcPct val="200000"/>
+              </a:lnSpc>
+            </a:pPr>
+            <a:r>
+              <a:rPr lang="zh-CN" altLang="en-US" sz="3200" b="1" dirty="0">
+                <a:solidFill>
+                  <a:srgbClr val="333333"/>
+                </a:solidFill>
+                <a:latin typeface="+mn-ea"/>
+                <a:ea typeface="+mn-ea"/>
+              </a:rPr>
+              <a:t>实验内容：</a:t>
+            </a:r>
+            <a:endParaRPr lang="en-US" altLang="zh-CN" sz="3200" b="1" dirty="0">
+              <a:solidFill>
+                <a:srgbClr val="333333"/>
+              </a:solidFill>
+              <a:latin typeface="+mn-ea"/>
+              <a:ea typeface="+mn-ea"/>
+            </a:endParaRPr>
+          </a:p>
+          <a:p>
+            <a:pPr algn="just">
+              <a:lnSpc>
+                <a:spcPct val="200000"/>
+              </a:lnSpc>
+            </a:pPr>
+            <a:r>
+              <a:rPr lang="zh-CN" altLang="en-US" sz="2600" dirty="0">
+                <a:solidFill>
+                  <a:srgbClr val="333333"/>
+                </a:solidFill>
+                <a:latin typeface="+mn-ea"/>
+                <a:ea typeface="+mn-ea"/>
+              </a:rPr>
+              <a:t>（</a:t>
+            </a:r>
+            <a:r>
+              <a:rPr lang="en-US" altLang="zh-CN" sz="2600" dirty="0">
+                <a:solidFill>
+                  <a:srgbClr val="333333"/>
+                </a:solidFill>
+                <a:latin typeface="+mn-ea"/>
+                <a:ea typeface="+mn-ea"/>
+              </a:rPr>
+              <a:t>1</a:t>
+            </a:r>
+            <a:r>
+              <a:rPr lang="zh-CN" altLang="en-US" sz="2600" dirty="0">
+                <a:solidFill>
+                  <a:srgbClr val="333333"/>
+                </a:solidFill>
+                <a:latin typeface="+mn-ea"/>
+                <a:ea typeface="+mn-ea"/>
+              </a:rPr>
+              <a:t>）</a:t>
+            </a:r>
+            <a:r>
+              <a:rPr lang="zh-CN" altLang="zh-CN" sz="2600" dirty="0">
+                <a:solidFill>
+                  <a:srgbClr val="333333"/>
+                </a:solidFill>
+                <a:latin typeface="+mn-ea"/>
+                <a:ea typeface="+mn-ea"/>
+              </a:rPr>
+              <a:t>结合课程代码，创建不同数据类型变量。</a:t>
+            </a:r>
+            <a:endParaRPr lang="en-US" altLang="zh-CN" sz="2600" dirty="0">
+              <a:solidFill>
+                <a:srgbClr val="333333"/>
+              </a:solidFill>
+              <a:latin typeface="+mn-ea"/>
+              <a:ea typeface="+mn-ea"/>
+            </a:endParaRPr>
+          </a:p>
+          <a:p>
+            <a:pPr algn="just">
+              <a:lnSpc>
+                <a:spcPct val="200000"/>
+              </a:lnSpc>
+            </a:pPr>
+            <a:r>
+              <a:rPr lang="zh-CN" altLang="zh-CN" sz="2600" dirty="0">
+                <a:solidFill>
+                  <a:srgbClr val="333333"/>
+                </a:solidFill>
+                <a:latin typeface="+mn-ea"/>
+                <a:ea typeface="+mn-ea"/>
+              </a:rPr>
+              <a:t>（</a:t>
+            </a:r>
+            <a:r>
+              <a:rPr lang="en-US" altLang="zh-CN" sz="2600" dirty="0">
+                <a:solidFill>
+                  <a:srgbClr val="333333"/>
+                </a:solidFill>
+                <a:latin typeface="+mn-ea"/>
+                <a:ea typeface="+mn-ea"/>
+              </a:rPr>
+              <a:t>2</a:t>
+            </a:r>
+            <a:r>
+              <a:rPr lang="zh-CN" altLang="zh-CN" sz="2600" dirty="0">
+                <a:solidFill>
+                  <a:srgbClr val="333333"/>
+                </a:solidFill>
+                <a:latin typeface="+mn-ea"/>
+                <a:ea typeface="+mn-ea"/>
+              </a:rPr>
+              <a:t>）通过代码测试不同数据类型变量基本功能。</a:t>
+            </a:r>
+            <a:endParaRPr lang="en-US" altLang="zh-CN" sz="2600" dirty="0">
+              <a:solidFill>
+                <a:srgbClr val="333333"/>
+              </a:solidFill>
+              <a:latin typeface="+mn-ea"/>
+              <a:ea typeface="+mn-ea"/>
+            </a:endParaRPr>
+          </a:p>
+        </p:txBody>
+      </p:sp>
+      <p:sp>
+        <p:nvSpPr>
+          <p:cNvPr id="4" name="文本框 3">
+            <a:extLst>
+              <a:ext uri="{FF2B5EF4-FFF2-40B4-BE49-F238E27FC236}">
+                <a16:creationId xmlns:a16="http://schemas.microsoft.com/office/drawing/2014/main" id="{001C264E-CE29-C5F1-81AC-04BEA710D6A4}"/>
+              </a:ext>
+            </a:extLst>
+          </p:cNvPr>
+          <p:cNvSpPr txBox="1"/>
+          <p:nvPr/>
+        </p:nvSpPr>
+        <p:spPr>
+          <a:xfrm>
+            <a:off x="939282" y="1566726"/>
+            <a:ext cx="9444700" cy="584775"/>
+          </a:xfrm>
+          <a:prstGeom prst="rect">
+            <a:avLst/>
+          </a:prstGeom>
+          <a:noFill/>
+        </p:spPr>
+        <p:txBody>
+          <a:bodyPr wrap="square">
+            <a:spAutoFit/>
+          </a:bodyPr>
+          <a:lstStyle/>
+          <a:p>
+            <a:r>
+              <a:rPr lang="zh-CN" altLang="en-US" sz="3200" b="1" u="sng" dirty="0">
+                <a:solidFill>
+                  <a:srgbClr val="FF0000"/>
+                </a:solidFill>
+                <a:latin typeface="+mn-ea"/>
+                <a:ea typeface="+mn-ea"/>
+              </a:rPr>
+              <a:t>题目：</a:t>
+            </a:r>
+            <a:r>
+              <a:rPr lang="zh-CN" altLang="zh-CN" sz="3200" b="1" u="sng" dirty="0">
+                <a:solidFill>
+                  <a:srgbClr val="FF0000"/>
+                </a:solidFill>
+                <a:latin typeface="+mn-ea"/>
+                <a:ea typeface="+mn-ea"/>
+              </a:rPr>
+              <a:t>不同数据类型变量创建与功能测试</a:t>
+            </a:r>
+          </a:p>
+        </p:txBody>
+      </p:sp>
+    </p:spTree>
+    <p:extLst>
+      <p:ext uri="{BB962C8B-B14F-4D97-AF65-F5344CB8AC3E}">
+        <p14:creationId xmlns:p14="http://schemas.microsoft.com/office/powerpoint/2010/main" val="2248982583"/>
+      </p:ext>
+    </p:extLst>
+  </p:cSld>
+  <p:clrMapOvr>
+    <a:masterClrMapping/>
+  </p:clrMapOvr>
+  <p:transition>
+    <p:fade/>
+  </p:transition>
+</p:sld>
+</file>
+
+<file path=ppt/slides/slide29.xml><?xml version="1.0" encoding="utf-8"?>
+<p:sld xmlns:a="http://schemas.openxmlformats.org/drawingml/2006/main" xmlns:r="http://schemas.openxmlformats.org/officeDocument/2006/relationships" xmlns:p="http://schemas.openxmlformats.org/presentationml/2006/main">
+  <p:cSld>
+    <p:spTree>
+      <p:nvGrpSpPr>
+        <p:cNvPr id="1" name="">
+          <a:extLst>
+            <a:ext uri="{FF2B5EF4-FFF2-40B4-BE49-F238E27FC236}">
+              <a16:creationId xmlns:a16="http://schemas.microsoft.com/office/drawing/2014/main" id="{DC83DA35-2C79-01EE-37C2-704744D15F52}"/>
+            </a:ext>
+          </a:extLst>
+        </p:cNvPr>
+        <p:cNvGrpSpPr/>
+        <p:nvPr/>
+      </p:nvGrpSpPr>
+      <p:grpSpPr>
+        <a:xfrm>
+          <a:off x="0" y="0"/>
+          <a:ext cx="0" cy="0"/>
+          <a:chOff x="0" y="0"/>
+          <a:chExt cx="0" cy="0"/>
+        </a:xfrm>
+      </p:grpSpPr>
+      <p:sp>
+        <p:nvSpPr>
+          <p:cNvPr id="3" name="标题 2">
+            <a:extLst>
+              <a:ext uri="{FF2B5EF4-FFF2-40B4-BE49-F238E27FC236}">
+                <a16:creationId xmlns:a16="http://schemas.microsoft.com/office/drawing/2014/main" id="{5986975F-4CAC-F7CC-F06F-967D5EDB5D4B}"/>
+              </a:ext>
+            </a:extLst>
+          </p:cNvPr>
+          <p:cNvSpPr>
+            <a:spLocks noGrp="1"/>
+          </p:cNvSpPr>
+          <p:nvPr>
+            <p:ph type="title"/>
+          </p:nvPr>
+        </p:nvSpPr>
+        <p:spPr>
+          <a:xfrm>
+            <a:off x="1" y="8526"/>
+            <a:ext cx="10537374" cy="792162"/>
+          </a:xfrm>
+        </p:spPr>
+        <p:txBody>
+          <a:bodyPr/>
+          <a:lstStyle/>
+          <a:p>
+            <a:r>
+              <a:rPr lang="zh-CN" altLang="en-US" dirty="0">
+                <a:latin typeface="微软雅黑" pitchFamily="34" charset="-122"/>
+                <a:ea typeface="微软雅黑" pitchFamily="34" charset="-122"/>
+              </a:rPr>
+              <a:t>三、</a:t>
+            </a:r>
+            <a:r>
+              <a:rPr lang="en-US" altLang="zh-CN" dirty="0">
+                <a:latin typeface="微软雅黑" pitchFamily="34" charset="-122"/>
+                <a:ea typeface="微软雅黑" pitchFamily="34" charset="-122"/>
+              </a:rPr>
+              <a:t>Python</a:t>
+            </a:r>
+            <a:r>
+              <a:rPr lang="zh-CN" altLang="en-US" dirty="0">
+                <a:latin typeface="微软雅黑" pitchFamily="34" charset="-122"/>
+                <a:ea typeface="微软雅黑" pitchFamily="34" charset="-122"/>
+              </a:rPr>
+              <a:t>开发环境配置</a:t>
+            </a:r>
+            <a:endParaRPr lang="zh-CN" altLang="en-US" dirty="0"/>
+          </a:p>
+        </p:txBody>
+      </p:sp>
+      <p:sp>
+        <p:nvSpPr>
+          <p:cNvPr id="11" name="TextBox 10">
+            <a:extLst>
+              <a:ext uri="{FF2B5EF4-FFF2-40B4-BE49-F238E27FC236}">
+                <a16:creationId xmlns:a16="http://schemas.microsoft.com/office/drawing/2014/main" id="{5414B4A0-3ABE-5F54-EA0E-4B44FAEC4901}"/>
+              </a:ext>
+            </a:extLst>
+          </p:cNvPr>
+          <p:cNvSpPr txBox="1"/>
+          <p:nvPr/>
+        </p:nvSpPr>
+        <p:spPr>
+          <a:xfrm>
+            <a:off x="510073" y="797358"/>
+            <a:ext cx="9743375" cy="743986"/>
+          </a:xfrm>
+          <a:prstGeom prst="rect">
+            <a:avLst/>
+          </a:prstGeom>
+          <a:noFill/>
+        </p:spPr>
+        <p:txBody>
+          <a:bodyPr wrap="square" rtlCol="0">
+            <a:spAutoFit/>
+          </a:bodyPr>
+          <a:lstStyle/>
+          <a:p>
+            <a:pPr algn="just">
+              <a:lnSpc>
+                <a:spcPct val="150000"/>
+              </a:lnSpc>
+            </a:pPr>
+            <a:r>
+              <a:rPr lang="zh-CN" altLang="en-US" sz="3200" b="1" dirty="0">
+                <a:solidFill>
+                  <a:srgbClr val="333333"/>
+                </a:solidFill>
+                <a:latin typeface="+mn-ea"/>
+                <a:ea typeface="+mn-ea"/>
+              </a:rPr>
+              <a:t>实验二</a:t>
+            </a:r>
+            <a:endParaRPr lang="en-US" altLang="zh-CN" sz="3200" b="1" dirty="0">
+              <a:solidFill>
+                <a:srgbClr val="333333"/>
+              </a:solidFill>
+              <a:latin typeface="+mn-ea"/>
+              <a:ea typeface="+mn-ea"/>
+            </a:endParaRPr>
+          </a:p>
+        </p:txBody>
+      </p:sp>
+      <p:sp>
+        <p:nvSpPr>
+          <p:cNvPr id="13" name="TextBox 12">
+            <a:extLst>
+              <a:ext uri="{FF2B5EF4-FFF2-40B4-BE49-F238E27FC236}">
+                <a16:creationId xmlns:a16="http://schemas.microsoft.com/office/drawing/2014/main" id="{A3D34A6E-5AD5-5520-58C6-DAB1B93AB8AA}"/>
+              </a:ext>
+            </a:extLst>
+          </p:cNvPr>
+          <p:cNvSpPr txBox="1"/>
+          <p:nvPr/>
+        </p:nvSpPr>
+        <p:spPr>
+          <a:xfrm>
+            <a:off x="583007" y="2182978"/>
+            <a:ext cx="11273508" cy="2957028"/>
+          </a:xfrm>
+          <a:prstGeom prst="rect">
+            <a:avLst/>
+          </a:prstGeom>
+          <a:noFill/>
+        </p:spPr>
+        <p:txBody>
+          <a:bodyPr wrap="square">
+            <a:spAutoFit/>
+          </a:bodyPr>
+          <a:lstStyle/>
+          <a:p>
+            <a:pPr algn="just">
+              <a:lnSpc>
+                <a:spcPct val="200000"/>
+              </a:lnSpc>
+            </a:pPr>
+            <a:r>
+              <a:rPr lang="zh-CN" altLang="en-US" sz="3200" b="1" dirty="0">
+                <a:solidFill>
+                  <a:srgbClr val="333333"/>
+                </a:solidFill>
+                <a:latin typeface="+mn-ea"/>
+                <a:ea typeface="+mn-ea"/>
+              </a:rPr>
+              <a:t>实验内容：</a:t>
+            </a:r>
+            <a:endParaRPr lang="en-US" altLang="zh-CN" sz="3200" b="1" dirty="0">
+              <a:solidFill>
+                <a:srgbClr val="333333"/>
+              </a:solidFill>
+              <a:latin typeface="+mn-ea"/>
+              <a:ea typeface="+mn-ea"/>
+            </a:endParaRPr>
+          </a:p>
+          <a:p>
+            <a:pPr algn="just">
+              <a:lnSpc>
+                <a:spcPct val="200000"/>
+              </a:lnSpc>
+            </a:pPr>
+            <a:r>
+              <a:rPr lang="zh-CN" altLang="zh-CN" sz="2600" dirty="0">
+                <a:solidFill>
+                  <a:srgbClr val="333333"/>
+                </a:solidFill>
+                <a:latin typeface="+mn-ea"/>
+                <a:ea typeface="+mn-ea"/>
+              </a:rPr>
+              <a:t>（</a:t>
+            </a:r>
+            <a:r>
+              <a:rPr lang="en-US" altLang="zh-CN" sz="2600" dirty="0">
+                <a:solidFill>
+                  <a:srgbClr val="333333"/>
+                </a:solidFill>
+                <a:latin typeface="+mn-ea"/>
+                <a:ea typeface="+mn-ea"/>
+              </a:rPr>
+              <a:t>1</a:t>
+            </a:r>
+            <a:r>
+              <a:rPr lang="zh-CN" altLang="zh-CN" sz="2600" dirty="0">
+                <a:solidFill>
+                  <a:srgbClr val="333333"/>
+                </a:solidFill>
+                <a:latin typeface="+mn-ea"/>
+                <a:ea typeface="+mn-ea"/>
+              </a:rPr>
+              <a:t>）结合课程代码，对不同数据类型变量进行对比；</a:t>
+            </a:r>
+            <a:endParaRPr lang="en-US" altLang="zh-CN" sz="2600" dirty="0">
+              <a:solidFill>
+                <a:srgbClr val="333333"/>
+              </a:solidFill>
+              <a:latin typeface="+mn-ea"/>
+              <a:ea typeface="+mn-ea"/>
+            </a:endParaRPr>
+          </a:p>
+          <a:p>
+            <a:pPr algn="just">
+              <a:lnSpc>
+                <a:spcPct val="200000"/>
+              </a:lnSpc>
+            </a:pPr>
+            <a:r>
+              <a:rPr lang="zh-CN" altLang="zh-CN" sz="2600" dirty="0">
+                <a:solidFill>
+                  <a:srgbClr val="333333"/>
+                </a:solidFill>
+                <a:latin typeface="+mn-ea"/>
+                <a:ea typeface="+mn-ea"/>
+              </a:rPr>
+              <a:t>（</a:t>
+            </a:r>
+            <a:r>
+              <a:rPr lang="en-US" altLang="zh-CN" sz="2600" dirty="0">
+                <a:solidFill>
+                  <a:srgbClr val="333333"/>
+                </a:solidFill>
+                <a:latin typeface="+mn-ea"/>
+                <a:ea typeface="+mn-ea"/>
+              </a:rPr>
+              <a:t>2</a:t>
+            </a:r>
+            <a:r>
+              <a:rPr lang="zh-CN" altLang="zh-CN" sz="2600" dirty="0">
+                <a:solidFill>
+                  <a:srgbClr val="333333"/>
+                </a:solidFill>
+                <a:latin typeface="+mn-ea"/>
+                <a:ea typeface="+mn-ea"/>
+              </a:rPr>
+              <a:t>）通过程序举例说明不同数据类型应用场景。</a:t>
+            </a:r>
+          </a:p>
+        </p:txBody>
+      </p:sp>
+      <p:sp>
+        <p:nvSpPr>
+          <p:cNvPr id="4" name="文本框 3">
+            <a:extLst>
+              <a:ext uri="{FF2B5EF4-FFF2-40B4-BE49-F238E27FC236}">
+                <a16:creationId xmlns:a16="http://schemas.microsoft.com/office/drawing/2014/main" id="{992DF4ED-D374-8CA5-6E88-358CE221CF49}"/>
+              </a:ext>
+            </a:extLst>
+          </p:cNvPr>
+          <p:cNvSpPr txBox="1"/>
+          <p:nvPr/>
+        </p:nvSpPr>
+        <p:spPr>
+          <a:xfrm>
+            <a:off x="939282" y="1631119"/>
+            <a:ext cx="9444700" cy="584775"/>
+          </a:xfrm>
+          <a:prstGeom prst="rect">
+            <a:avLst/>
+          </a:prstGeom>
+          <a:noFill/>
+        </p:spPr>
+        <p:txBody>
+          <a:bodyPr wrap="square">
+            <a:spAutoFit/>
+          </a:bodyPr>
+          <a:lstStyle/>
+          <a:p>
+            <a:r>
+              <a:rPr lang="zh-CN" altLang="en-US" sz="3200" b="1" u="sng" dirty="0">
+                <a:solidFill>
+                  <a:srgbClr val="FF0000"/>
+                </a:solidFill>
+                <a:latin typeface="+mn-ea"/>
+                <a:ea typeface="+mn-ea"/>
+              </a:rPr>
+              <a:t>题目：不同</a:t>
+            </a:r>
+            <a:r>
+              <a:rPr lang="zh-CN" altLang="zh-CN" sz="3200" b="1" u="sng" dirty="0">
+                <a:solidFill>
+                  <a:srgbClr val="FF0000"/>
+                </a:solidFill>
+                <a:latin typeface="+mn-ea"/>
+                <a:ea typeface="+mn-ea"/>
+              </a:rPr>
+              <a:t>数据类型</a:t>
+            </a:r>
+            <a:r>
+              <a:rPr lang="zh-CN" altLang="en-US" sz="3200" b="1" u="sng" dirty="0">
+                <a:solidFill>
+                  <a:srgbClr val="FF0000"/>
+                </a:solidFill>
+                <a:latin typeface="+mn-ea"/>
+                <a:ea typeface="+mn-ea"/>
+              </a:rPr>
+              <a:t>基本功能</a:t>
+            </a:r>
+            <a:r>
+              <a:rPr lang="zh-CN" altLang="zh-CN" sz="3200" b="1" u="sng" dirty="0">
+                <a:solidFill>
+                  <a:srgbClr val="FF0000"/>
+                </a:solidFill>
+                <a:latin typeface="+mn-ea"/>
+                <a:ea typeface="+mn-ea"/>
+              </a:rPr>
+              <a:t>对比及应用</a:t>
+            </a:r>
+            <a:r>
+              <a:rPr lang="zh-CN" altLang="en-US" sz="3200" b="1" u="sng" dirty="0">
+                <a:solidFill>
+                  <a:srgbClr val="FF0000"/>
+                </a:solidFill>
+                <a:latin typeface="+mn-ea"/>
+                <a:ea typeface="+mn-ea"/>
+              </a:rPr>
+              <a:t>示例</a:t>
+            </a:r>
+            <a:endParaRPr lang="zh-CN" altLang="zh-CN" sz="3200" b="1" u="sng" dirty="0">
+              <a:solidFill>
+                <a:srgbClr val="FF0000"/>
+              </a:solidFill>
+              <a:latin typeface="+mn-ea"/>
+              <a:ea typeface="+mn-ea"/>
+            </a:endParaRPr>
+          </a:p>
+        </p:txBody>
+      </p:sp>
+    </p:spTree>
+    <p:extLst>
+      <p:ext uri="{BB962C8B-B14F-4D97-AF65-F5344CB8AC3E}">
+        <p14:creationId xmlns:p14="http://schemas.microsoft.com/office/powerpoint/2010/main" val="3160250964"/>
       </p:ext>
     </p:extLst>
   </p:cSld>
@@ -32086,6 +32636,16 @@
               <a:buAutoNum type="arabicPeriod"/>
             </a:pPr>
             <a:r>
+              <a:rPr lang="en-US" altLang="zh-CN" sz="2600" b="1" dirty="0">
+                <a:solidFill>
+                  <a:srgbClr val="151515"/>
+                </a:solidFill>
+                <a:latin typeface="+mn-ea"/>
+                <a:ea typeface="+mn-ea"/>
+              </a:rPr>
+              <a:t>Bool</a:t>
+            </a:r>
+            <a:r>
               <a:rPr lang="en-US" altLang="zh-CN" sz="2600" dirty="0">
                 <a:solidFill>
                   <a:srgbClr val="151515"/>
@@ -32093,7 +32653,7 @@
                 <a:latin typeface="+mn-ea"/>
                 <a:ea typeface="+mn-ea"/>
               </a:rPr>
-              <a:t>Bool (</a:t>
+              <a:t> (</a:t>
             </a:r>
             <a:r>
               <a:rPr lang="zh-CN" altLang="en-US" sz="2600" dirty="0">
@@ -32144,6 +32704,16 @@
               <a:buAutoNum type="arabicPeriod"/>
             </a:pPr>
             <a:r>
+              <a:rPr lang="en-US" altLang="zh-CN" sz="2600" b="1" dirty="0">
+                <a:solidFill>
+                  <a:srgbClr val="151515"/>
+                </a:solidFill>
+                <a:latin typeface="+mn-ea"/>
+                <a:ea typeface="+mn-ea"/>
+              </a:rPr>
+              <a:t>Number</a:t>
+            </a:r>
+            <a:r>
               <a:rPr lang="en-US" altLang="zh-CN" sz="2600" dirty="0">
                 <a:solidFill>
                   <a:srgbClr val="151515"/>
@@ -32151,7 +32721,7 @@
                 <a:latin typeface="+mn-ea"/>
                 <a:ea typeface="+mn-ea"/>
               </a:rPr>
-              <a:t>Number (</a:t>
+              <a:t> (</a:t>
             </a:r>
             <a:r>
               <a:rPr lang="zh-CN" altLang="en-US" sz="2600" dirty="0">
@@ -32199,6 +32769,16 @@
               <a:buAutoNum type="arabicPeriod"/>
             </a:pPr>
             <a:r>
+              <a:rPr lang="en-US" altLang="zh-CN" sz="2600" b="1" dirty="0">
+                <a:solidFill>
+                  <a:srgbClr val="151515"/>
+                </a:solidFill>
+                <a:latin typeface="+mn-ea"/>
+                <a:ea typeface="+mn-ea"/>
+              </a:rPr>
+              <a:t>String</a:t>
+            </a:r>
+            <a:r>
               <a:rPr lang="en-US" altLang="zh-CN" sz="2600" dirty="0">
                 <a:solidFill>
                   <a:srgbClr val="151515"/>
@@ -32206,7 +32786,7 @@
                 <a:latin typeface="+mn-ea"/>
                 <a:ea typeface="+mn-ea"/>
               </a:rPr>
-              <a:t>String (</a:t>
+              <a:t> (</a:t>
             </a:r>
             <a:r>
               <a:rPr lang="zh-CN" altLang="en-US" sz="2600" dirty="0">
@@ -32256,6 +32836,16 @@
               </a:lnSpc>
             </a:pPr>
             <a:r>
+              <a:rPr lang="en-US" altLang="zh-CN" sz="2600" b="1" dirty="0">
+                <a:solidFill>
+                  <a:srgbClr val="151515"/>
+                </a:solidFill>
+                <a:latin typeface="+mn-ea"/>
+                <a:ea typeface="+mn-ea"/>
+              </a:rPr>
+              <a:t>4. List </a:t>
+            </a:r>
+            <a:r>
               <a:rPr lang="en-US" altLang="zh-CN" sz="2600" dirty="0">
                 <a:solidFill>
                   <a:srgbClr val="151515"/>
@@ -32263,7 +32853,7 @@
                 <a:latin typeface="+mn-ea"/>
                 <a:ea typeface="+mn-ea"/>
               </a:rPr>
-              <a:t>4. List (</a:t>
+              <a:t>(</a:t>
             </a:r>
             <a:r>
               <a:rPr lang="zh-CN" altLang="en-US" sz="2600" dirty="0">
@@ -32330,6 +32920,16 @@
               </a:lnSpc>
             </a:pPr>
             <a:r>
+              <a:rPr lang="en-US" altLang="zh-CN" sz="2600" b="1" dirty="0">
+                <a:solidFill>
+                  <a:srgbClr val="151515"/>
+                </a:solidFill>
+                <a:latin typeface="+mn-ea"/>
+                <a:ea typeface="+mn-ea"/>
+              </a:rPr>
+              <a:t>5. Tuple </a:t>
+            </a:r>
+            <a:r>
               <a:rPr lang="en-US" altLang="zh-CN" sz="2600" dirty="0">
                 <a:solidFill>
                   <a:srgbClr val="151515"/>
@@ -32337,7 +32937,7 @@
                 <a:latin typeface="+mn-ea"/>
                 <a:ea typeface="+mn-ea"/>
               </a:rPr>
-              <a:t>5. Tuple (</a:t>
+              <a:t>(</a:t>
             </a:r>
             <a:r>
               <a:rPr lang="zh-CN" altLang="en-US" sz="2600" dirty="0">
@@ -32433,6 +33033,16 @@
               </a:lnSpc>
             </a:pPr>
             <a:r>
+              <a:rPr lang="en-US" altLang="zh-CN" sz="2600" b="1" dirty="0">
+                <a:solidFill>
+                  <a:srgbClr val="151515"/>
+                </a:solidFill>
+                <a:latin typeface="+mn-ea"/>
+                <a:ea typeface="+mn-ea"/>
+              </a:rPr>
+              <a:t>6. Dictionary </a:t>
+            </a:r>
+            <a:r>
               <a:rPr lang="en-US" altLang="zh-CN" sz="2600" dirty="0">
                 <a:solidFill>
                   <a:srgbClr val="151515"/>
@@ -32440,7 +33050,7 @@
                 <a:latin typeface="+mn-ea"/>
                 <a:ea typeface="+mn-ea"/>
               </a:rPr>
-              <a:t>6. Dictionary (</a:t>
+              <a:t>(</a:t>
             </a:r>
             <a:r>
               <a:rPr lang="zh-CN" altLang="en-US" sz="2600" dirty="0">
@@ -32527,6 +33137,16 @@
               </a:lnSpc>
             </a:pPr>
             <a:r>
+              <a:rPr lang="en-US" altLang="zh-CN" sz="2600" b="1" dirty="0">
+                <a:solidFill>
+                  <a:srgbClr val="151515"/>
+                </a:solidFill>
+                <a:latin typeface="+mn-ea"/>
+                <a:ea typeface="+mn-ea"/>
+              </a:rPr>
+              <a:t>7. Set </a:t>
+            </a:r>
+            <a:r>
               <a:rPr lang="en-US" altLang="zh-CN" sz="2600" dirty="0">
                 <a:solidFill>
                   <a:srgbClr val="151515"/>
@@ -32534,7 +33154,7 @@
                 <a:latin typeface="+mn-ea"/>
                 <a:ea typeface="+mn-ea"/>
               </a:rPr>
-              <a:t>7. Set (</a:t>
+              <a:t>(</a:t>
             </a:r>
             <a:r>
               <a:rPr lang="zh-CN" altLang="en-US" sz="2600" dirty="0">
@@ -33888,52 +34508,43 @@
                 </a:solidFill>
                 <a:latin typeface="+mn-ea"/>
               </a:rPr>
-              <a:t> number</a:t>
+              <a:t> number (</a:t>
+            </a:r>
+            <a:r>
+              <a:rPr lang="en-US" altLang="zh-CN" sz="2800" dirty="0">
+                <a:solidFill>
+                  <a:schemeClr val="bg2"/>
+                </a:solidFill>
+                <a:latin typeface="+mn-ea"/>
+              </a:rPr>
+              <a:t>int,</a:t>
             </a:r>
             <a:r>
               <a:rPr lang="zh-CN" altLang="en-US" sz="2800" dirty="0">
                 <a:solidFill>
+                  <a:schemeClr val="bg2"/>
+                </a:solidFill>
+                <a:latin typeface="+mn-ea"/>
+              </a:rPr>
+              <a:t> </a:t>
+            </a:r>
+            <a:r>
+              <a:rPr lang="en-US" altLang="zh-CN" sz="2800" dirty="0">
+                <a:solidFill>
+                  <a:schemeClr val="bg2"/>
+                </a:solidFill>
+                <a:latin typeface="+mn-ea"/>
+              </a:rPr>
+              <a:t>float, complex</a:t>
+            </a:r>
+            <a:r>
+              <a:rPr lang="en-US" altLang="zh-CN" sz="2800" dirty="0">
+                <a:solidFill>
                   <a:srgbClr val="151515"/>
                 </a:solidFill>
                 <a:latin typeface="+mn-ea"/>
               </a:rPr>
-              <a:t>（</a:t>
-            </a:r>
-            <a:r>
-              <a:rPr lang="en-US" altLang="zh-CN" sz="2800" dirty="0">
-                <a:solidFill>
-                  <a:schemeClr val="bg2"/>
-                </a:solidFill>
-                <a:latin typeface="+mn-ea"/>
-              </a:rPr>
-              <a:t> int</a:t>
-            </a:r>
-            <a:r>
-              <a:rPr lang="zh-CN" altLang="en-US" sz="2800" dirty="0">
-                <a:solidFill>
-                  <a:schemeClr val="bg2"/>
-                </a:solidFill>
-                <a:latin typeface="+mn-ea"/>
-              </a:rPr>
-              <a:t>，</a:t>
-            </a:r>
-            <a:r>
-              <a:rPr lang="en-US" altLang="zh-CN" sz="2800" dirty="0">
-                <a:solidFill>
-                  <a:schemeClr val="bg2"/>
-                </a:solidFill>
-                <a:latin typeface="+mn-ea"/>
-              </a:rPr>
-              <a:t>float </a:t>
-            </a:r>
-            <a:r>
-              <a:rPr lang="zh-CN" altLang="en-US" sz="2800" dirty="0">
-                <a:solidFill>
-                  <a:srgbClr val="151515"/>
-                </a:solidFill>
-                <a:latin typeface="+mn-ea"/>
-              </a:rPr>
-              <a:t>）</a:t>
+              <a:t>)</a:t>
             </a:r>
             <a:r>
               <a:rPr lang="zh-CN" altLang="en-US" sz="2800" dirty="0">
@@ -34087,11 +34698,17 @@
           <p:cNvGraphicFramePr>
             <a:graphicFrameLocks noGrp="1"/>
           </p:cNvGraphicFramePr>
-          <p:nvPr/>
+          <p:nvPr>
+            <p:extLst>
+              <p:ext uri="{D42A27DB-BD31-4B8C-83A1-F6EECF244321}">
+                <p14:modId xmlns:p14="http://schemas.microsoft.com/office/powerpoint/2010/main" val="266020763"/>
+              </p:ext>
+            </p:extLst>
+          </p:nvPr>
         </p:nvGraphicFramePr>
         <p:xfrm>
-          <a:off x="3287484" y="4203562"/>
-          <a:ext cx="8697689" cy="2494886"/>
+          <a:off x="3300363" y="4210120"/>
+          <a:ext cx="8697689" cy="2403181"/>
         </p:xfrm>
         <a:graphic>
           <a:graphicData uri="http://schemas.openxmlformats.org/drawingml/2006/table">
@@ -34613,7 +35230,7 @@
                   </a:ext>
                 </a:extLst>
               </a:tr>
-              <a:tr h="515707">
+              <a:tr h="662628">
                 <a:tc>
                   <a:txBody>
                     <a:bodyPr/>
@@ -34739,7 +35356,7 @@
                     <a:p>
                       <a:pPr algn="ctr"/>
                       <a:r>
-                        <a:rPr lang="zh-CN" altLang="en-US" sz="2800">
+                        <a:rPr lang="zh-CN" altLang="en-US" sz="2800" dirty="0">
                           <a:solidFill>
                             <a:schemeClr val="bg2"/>
                           </a:solidFill>
@@ -34856,7 +35473,7 @@
                   </a:ext>
                 </a:extLst>
               </a:tr>
-              <a:tr h="940406">
+              <a:tr h="704233">
                 <a:tc>
                   <a:txBody>
                     <a:bodyPr/>
